--- a/notebooks/Evovo_Ajirioghene_AmesHousing.pptx
+++ b/notebooks/Evovo_Ajirioghene_AmesHousing.pptx
@@ -120,550 +120,6 @@
     </p:ext>
   </p:extLst>
 </p:presentation>
-</file>
-
-<file path=ppt/charts/chart1.xml><?xml version="1.0" encoding="utf-8"?>
-<c:chartSpace xmlns:c="http://schemas.openxmlformats.org/drawingml/2006/chart" xmlns:a="http://schemas.openxmlformats.org/drawingml/2006/main" xmlns:r="http://schemas.openxmlformats.org/officeDocument/2006/relationships" xmlns:c16r2="http://schemas.microsoft.com/office/drawing/2015/06/chart">
-  <c:date1904 val="0"/>
-  <c:lang val="en-US"/>
-  <c:roundedCorners val="1"/>
-  <c:style val="2"/>
-  <c:chart>
-    <c:autoTitleDeleted val="1"/>
-    <c:plotArea>
-      <c:layout/>
-      <c:barChart>
-        <c:barDir val="col"/>
-        <c:grouping val="clustered"/>
-        <c:varyColors val="0"/>
-        <c:ser>
-          <c:idx val="0"/>
-          <c:order val="0"/>
-          <c:tx>
-            <c:strRef>
-              <c:f>Sheet1!$B$1</c:f>
-              <c:strCache>
-                <c:ptCount val="1"/>
-                <c:pt idx="0">
-                  <c:v>Avg Sale Price</c:v>
-                </c:pt>
-              </c:strCache>
-            </c:strRef>
-          </c:tx>
-          <c:spPr>
-            <a:solidFill>
-              <a:srgbClr val="065A82"/>
-            </a:solidFill>
-            <a:effectLst/>
-          </c:spPr>
-          <c:invertIfNegative val="0"/>
-          <c:dPt>
-            <c:idx val="0"/>
-            <c:invertIfNegative val="0"/>
-            <c:bubble3D val="0"/>
-            <c:spPr>
-              <a:solidFill>
-                <a:srgbClr val="065A82"/>
-              </a:solidFill>
-              <a:effectLst/>
-            </c:spPr>
-            <c:extLst>
-              <c:ext xmlns:c16="http://schemas.microsoft.com/office/drawing/2014/chart" uri="{C3380CC4-5D6E-409C-BE32-E72D297353CC}">
-                <c16:uniqueId val="{00000001-E994-4B2F-90C9-B91078E2C91E}"/>
-              </c:ext>
-            </c:extLst>
-          </c:dPt>
-          <c:dPt>
-            <c:idx val="1"/>
-            <c:invertIfNegative val="0"/>
-            <c:bubble3D val="0"/>
-            <c:spPr>
-              <a:solidFill>
-                <a:srgbClr val="CADCFC"/>
-              </a:solidFill>
-              <a:effectLst/>
-            </c:spPr>
-            <c:extLst>
-              <c:ext xmlns:c16="http://schemas.microsoft.com/office/drawing/2014/chart" uri="{C3380CC4-5D6E-409C-BE32-E72D297353CC}">
-                <c16:uniqueId val="{00000003-E994-4B2F-90C9-B91078E2C91E}"/>
-              </c:ext>
-            </c:extLst>
-          </c:dPt>
-          <c:dLbls>
-            <c:numFmt formatCode="#,##0" sourceLinked="0"/>
-            <c:spPr>
-              <a:noFill/>
-              <a:ln>
-                <a:noFill/>
-              </a:ln>
-              <a:effectLst/>
-            </c:spPr>
-            <c:txPr>
-              <a:bodyPr/>
-              <a:lstStyle/>
-              <a:p>
-                <a:pPr>
-                  <a:defRPr sz="1200" b="0" i="0" u="none" strike="noStrike">
-                    <a:solidFill>
-                      <a:srgbClr val="1E293B"/>
-                    </a:solidFill>
-                    <a:latin typeface="Arial"/>
-                  </a:defRPr>
-                </a:pPr>
-                <a:endParaRPr lang="en-US"/>
-              </a:p>
-            </c:txPr>
-            <c:showLegendKey val="0"/>
-            <c:showVal val="1"/>
-            <c:showCatName val="0"/>
-            <c:showSerName val="0"/>
-            <c:showPercent val="0"/>
-            <c:showBubbleSize val="0"/>
-            <c:showLeaderLines val="0"/>
-            <c:extLst>
-              <c:ext xmlns:c15="http://schemas.microsoft.com/office/drawing/2012/chart" uri="{CE6537A1-D6FC-4f65-9D91-7224C49458BB}">
-                <c15:showLeaderLines val="0"/>
-              </c:ext>
-            </c:extLst>
-          </c:dLbls>
-          <c:cat>
-            <c:strRef>
-              <c:f>Sheet1!$A$2:$A$3</c:f>
-              <c:strCache>
-                <c:ptCount val="2"/>
-                <c:pt idx="0">
-                  <c:v>With Central Air</c:v>
-                </c:pt>
-                <c:pt idx="1">
-                  <c:v>Without Central Air</c:v>
-                </c:pt>
-              </c:strCache>
-            </c:strRef>
-          </c:cat>
-          <c:val>
-            <c:numRef>
-              <c:f>Sheet1!$B$2:$B$3</c:f>
-              <c:numCache>
-                <c:formatCode>General</c:formatCode>
-                <c:ptCount val="2"/>
-                <c:pt idx="0">
-                  <c:v>186452</c:v>
-                </c:pt>
-                <c:pt idx="1">
-                  <c:v>101890</c:v>
-                </c:pt>
-              </c:numCache>
-            </c:numRef>
-          </c:val>
-          <c:extLst>
-            <c:ext xmlns:c16="http://schemas.microsoft.com/office/drawing/2014/chart" uri="{C3380CC4-5D6E-409C-BE32-E72D297353CC}">
-              <c16:uniqueId val="{00000004-E994-4B2F-90C9-B91078E2C91E}"/>
-            </c:ext>
-          </c:extLst>
-        </c:ser>
-        <c:dLbls>
-          <c:showLegendKey val="0"/>
-          <c:showVal val="1"/>
-          <c:showCatName val="0"/>
-          <c:showSerName val="0"/>
-          <c:showPercent val="0"/>
-          <c:showBubbleSize val="0"/>
-        </c:dLbls>
-        <c:gapWidth val="150"/>
-        <c:axId val="2094734554"/>
-        <c:axId val="2094734552"/>
-      </c:barChart>
-      <c:catAx>
-        <c:axId val="2094734554"/>
-        <c:scaling>
-          <c:orientation val="minMax"/>
-        </c:scaling>
-        <c:delete val="0"/>
-        <c:axPos val="b"/>
-        <c:numFmt formatCode="General" sourceLinked="1"/>
-        <c:majorTickMark val="out"/>
-        <c:minorTickMark val="none"/>
-        <c:tickLblPos val="low"/>
-        <c:spPr>
-          <a:ln w="12700" cap="flat">
-            <a:solidFill>
-              <a:srgbClr val="888888"/>
-            </a:solidFill>
-            <a:prstDash val="solid"/>
-            <a:round/>
-          </a:ln>
-        </c:spPr>
-        <c:txPr>
-          <a:bodyPr/>
-          <a:lstStyle/>
-          <a:p>
-            <a:pPr>
-              <a:defRPr sz="1200" b="0" i="0" u="none" strike="noStrike">
-                <a:solidFill>
-                  <a:srgbClr val="64748B"/>
-                </a:solidFill>
-                <a:latin typeface="Arial"/>
-              </a:defRPr>
-            </a:pPr>
-            <a:endParaRPr lang="en-US"/>
-          </a:p>
-        </c:txPr>
-        <c:crossAx val="2094734552"/>
-        <c:crosses val="autoZero"/>
-        <c:auto val="1"/>
-        <c:lblAlgn val="ctr"/>
-        <c:lblOffset val="100"/>
-        <c:noMultiLvlLbl val="1"/>
-      </c:catAx>
-      <c:valAx>
-        <c:axId val="2094734552"/>
-        <c:scaling>
-          <c:orientation val="minMax"/>
-        </c:scaling>
-        <c:delete val="0"/>
-        <c:axPos val="l"/>
-        <c:majorGridlines>
-          <c:spPr>
-            <a:ln w="6350" cap="flat">
-              <a:solidFill>
-                <a:srgbClr val="E2E8F0"/>
-              </a:solidFill>
-              <a:prstDash val="solid"/>
-              <a:round/>
-            </a:ln>
-          </c:spPr>
-        </c:majorGridlines>
-        <c:numFmt formatCode="General" sourceLinked="0"/>
-        <c:majorTickMark val="out"/>
-        <c:minorTickMark val="none"/>
-        <c:tickLblPos val="nextTo"/>
-        <c:spPr>
-          <a:ln w="12700" cap="flat">
-            <a:solidFill>
-              <a:srgbClr val="888888"/>
-            </a:solidFill>
-            <a:prstDash val="solid"/>
-            <a:round/>
-          </a:ln>
-        </c:spPr>
-        <c:txPr>
-          <a:bodyPr/>
-          <a:lstStyle/>
-          <a:p>
-            <a:pPr>
-              <a:defRPr sz="1200" b="0" i="0" u="none" strike="noStrike">
-                <a:solidFill>
-                  <a:srgbClr val="64748B"/>
-                </a:solidFill>
-                <a:latin typeface="Arial"/>
-              </a:defRPr>
-            </a:pPr>
-            <a:endParaRPr lang="en-US"/>
-          </a:p>
-        </c:txPr>
-        <c:crossAx val="2094734554"/>
-        <c:crosses val="autoZero"/>
-        <c:crossBetween val="between"/>
-      </c:valAx>
-      <c:spPr>
-        <a:noFill/>
-        <a:ln>
-          <a:noFill/>
-        </a:ln>
-        <a:effectLst/>
-      </c:spPr>
-    </c:plotArea>
-    <c:plotVisOnly val="1"/>
-    <c:dispBlanksAs val="span"/>
-    <c:showDLblsOverMax val="1"/>
-  </c:chart>
-  <c:spPr>
-    <a:solidFill>
-      <a:srgbClr val="FFFFFF"/>
-    </a:solidFill>
-    <a:ln>
-      <a:noFill/>
-    </a:ln>
-    <a:effectLst/>
-  </c:spPr>
-  <c:externalData r:id="rId1">
-    <c:autoUpdate val="0"/>
-  </c:externalData>
-</c:chartSpace>
-</file>
-
-<file path=ppt/charts/chart2.xml><?xml version="1.0" encoding="utf-8"?>
-<c:chartSpace xmlns:c="http://schemas.openxmlformats.org/drawingml/2006/chart" xmlns:a="http://schemas.openxmlformats.org/drawingml/2006/main" xmlns:r="http://schemas.openxmlformats.org/officeDocument/2006/relationships" xmlns:c16r2="http://schemas.microsoft.com/office/drawing/2015/06/chart">
-  <c:date1904 val="0"/>
-  <c:lang val="en-US"/>
-  <c:roundedCorners val="1"/>
-  <c:style val="2"/>
-  <c:chart>
-    <c:autoTitleDeleted val="1"/>
-    <c:plotArea>
-      <c:layout/>
-      <c:barChart>
-        <c:barDir val="bar"/>
-        <c:grouping val="clustered"/>
-        <c:varyColors val="0"/>
-        <c:ser>
-          <c:idx val="0"/>
-          <c:order val="0"/>
-          <c:tx>
-            <c:strRef>
-              <c:f>Sheet1!$B$1</c:f>
-              <c:strCache>
-                <c:ptCount val="1"/>
-                <c:pt idx="0">
-                  <c:v>Avg Sale Price</c:v>
-                </c:pt>
-              </c:strCache>
-            </c:strRef>
-          </c:tx>
-          <c:spPr>
-            <a:solidFill>
-              <a:srgbClr val="065A82"/>
-            </a:solidFill>
-            <a:effectLst/>
-          </c:spPr>
-          <c:invertIfNegative val="0"/>
-          <c:dLbls>
-            <c:numFmt formatCode="#,##0" sourceLinked="0"/>
-            <c:spPr>
-              <a:noFill/>
-              <a:ln>
-                <a:noFill/>
-              </a:ln>
-              <a:effectLst/>
-            </c:spPr>
-            <c:txPr>
-              <a:bodyPr/>
-              <a:lstStyle/>
-              <a:p>
-                <a:pPr>
-                  <a:defRPr sz="1200" b="0" i="0" u="none" strike="noStrike">
-                    <a:solidFill>
-                      <a:srgbClr val="1E293B"/>
-                    </a:solidFill>
-                    <a:latin typeface="Arial"/>
-                  </a:defRPr>
-                </a:pPr>
-                <a:endParaRPr lang="en-US"/>
-              </a:p>
-            </c:txPr>
-            <c:showLegendKey val="0"/>
-            <c:showVal val="1"/>
-            <c:showCatName val="0"/>
-            <c:showSerName val="0"/>
-            <c:showPercent val="0"/>
-            <c:showBubbleSize val="0"/>
-            <c:showLeaderLines val="0"/>
-            <c:extLst>
-              <c:ext xmlns:c15="http://schemas.microsoft.com/office/drawing/2012/chart" uri="{CE6537A1-D6FC-4f65-9D91-7224C49458BB}">
-                <c15:showLeaderLines val="0"/>
-              </c:ext>
-            </c:extLst>
-          </c:dLbls>
-          <c:cat>
-            <c:strRef>
-              <c:f>Sheet1!$A$2:$A$9</c:f>
-              <c:strCache>
-                <c:ptCount val="8"/>
-                <c:pt idx="0">
-                  <c:v>Northridge</c:v>
-                </c:pt>
-                <c:pt idx="1">
-                  <c:v>Stone Brook</c:v>
-                </c:pt>
-                <c:pt idx="2">
-                  <c:v>Nridge Hts</c:v>
-                </c:pt>
-                <c:pt idx="3">
-                  <c:v>Veenker</c:v>
-                </c:pt>
-                <c:pt idx="4">
-                  <c:v>Timberland</c:v>
-                </c:pt>
-                <c:pt idx="5">
-                  <c:v>North Ames</c:v>
-                </c:pt>
-                <c:pt idx="6">
-                  <c:v>Edwards</c:v>
-                </c:pt>
-                <c:pt idx="7">
-                  <c:v>Meadow Vill</c:v>
-                </c:pt>
-              </c:strCache>
-            </c:strRef>
-          </c:cat>
-          <c:val>
-            <c:numRef>
-              <c:f>Sheet1!$B$2:$B$9</c:f>
-              <c:numCache>
-                <c:formatCode>General</c:formatCode>
-                <c:ptCount val="8"/>
-                <c:pt idx="0">
-                  <c:v>330319</c:v>
-                </c:pt>
-                <c:pt idx="1">
-                  <c:v>324229</c:v>
-                </c:pt>
-                <c:pt idx="2">
-                  <c:v>322018</c:v>
-                </c:pt>
-                <c:pt idx="3">
-                  <c:v>248314</c:v>
-                </c:pt>
-                <c:pt idx="4">
-                  <c:v>246599</c:v>
-                </c:pt>
-                <c:pt idx="5">
-                  <c:v>145097</c:v>
-                </c:pt>
-                <c:pt idx="6">
-                  <c:v>130843</c:v>
-                </c:pt>
-                <c:pt idx="7">
-                  <c:v>95756</c:v>
-                </c:pt>
-              </c:numCache>
-            </c:numRef>
-          </c:val>
-          <c:extLst>
-            <c:ext xmlns:c16="http://schemas.microsoft.com/office/drawing/2014/chart" uri="{C3380CC4-5D6E-409C-BE32-E72D297353CC}">
-              <c16:uniqueId val="{00000000-B15D-4D32-B1D8-31199E7FADDD}"/>
-            </c:ext>
-          </c:extLst>
-        </c:ser>
-        <c:dLbls>
-          <c:showLegendKey val="0"/>
-          <c:showVal val="1"/>
-          <c:showCatName val="0"/>
-          <c:showSerName val="0"/>
-          <c:showPercent val="0"/>
-          <c:showBubbleSize val="0"/>
-        </c:dLbls>
-        <c:gapWidth val="150"/>
-        <c:axId val="2094734554"/>
-        <c:axId val="2094734552"/>
-      </c:barChart>
-      <c:catAx>
-        <c:axId val="2094734554"/>
-        <c:scaling>
-          <c:orientation val="minMax"/>
-        </c:scaling>
-        <c:delete val="0"/>
-        <c:axPos val="l"/>
-        <c:numFmt formatCode="General" sourceLinked="1"/>
-        <c:majorTickMark val="out"/>
-        <c:minorTickMark val="none"/>
-        <c:tickLblPos val="nextTo"/>
-        <c:spPr>
-          <a:ln w="12700" cap="flat">
-            <a:solidFill>
-              <a:srgbClr val="888888"/>
-            </a:solidFill>
-            <a:prstDash val="solid"/>
-            <a:round/>
-          </a:ln>
-        </c:spPr>
-        <c:txPr>
-          <a:bodyPr/>
-          <a:lstStyle/>
-          <a:p>
-            <a:pPr>
-              <a:defRPr sz="1200" b="0" i="0" u="none" strike="noStrike">
-                <a:solidFill>
-                  <a:srgbClr val="64748B"/>
-                </a:solidFill>
-                <a:latin typeface="Arial"/>
-              </a:defRPr>
-            </a:pPr>
-            <a:endParaRPr lang="en-US"/>
-          </a:p>
-        </c:txPr>
-        <c:crossAx val="2094734552"/>
-        <c:crosses val="autoZero"/>
-        <c:auto val="1"/>
-        <c:lblAlgn val="ctr"/>
-        <c:lblOffset val="100"/>
-        <c:noMultiLvlLbl val="1"/>
-      </c:catAx>
-      <c:valAx>
-        <c:axId val="2094734552"/>
-        <c:scaling>
-          <c:orientation val="minMax"/>
-        </c:scaling>
-        <c:delete val="0"/>
-        <c:axPos val="b"/>
-        <c:majorGridlines>
-          <c:spPr>
-            <a:ln w="6350" cap="flat">
-              <a:solidFill>
-                <a:srgbClr val="E2E8F0"/>
-              </a:solidFill>
-              <a:prstDash val="solid"/>
-              <a:round/>
-            </a:ln>
-          </c:spPr>
-        </c:majorGridlines>
-        <c:numFmt formatCode="General" sourceLinked="0"/>
-        <c:majorTickMark val="out"/>
-        <c:minorTickMark val="none"/>
-        <c:tickLblPos val="low"/>
-        <c:spPr>
-          <a:ln w="12700" cap="flat">
-            <a:solidFill>
-              <a:srgbClr val="888888"/>
-            </a:solidFill>
-            <a:prstDash val="solid"/>
-            <a:round/>
-          </a:ln>
-        </c:spPr>
-        <c:txPr>
-          <a:bodyPr/>
-          <a:lstStyle/>
-          <a:p>
-            <a:pPr>
-              <a:defRPr sz="1200" b="0" i="0" u="none" strike="noStrike">
-                <a:solidFill>
-                  <a:srgbClr val="64748B"/>
-                </a:solidFill>
-                <a:latin typeface="Arial"/>
-              </a:defRPr>
-            </a:pPr>
-            <a:endParaRPr lang="en-US"/>
-          </a:p>
-        </c:txPr>
-        <c:crossAx val="2094734554"/>
-        <c:crosses val="autoZero"/>
-        <c:crossBetween val="between"/>
-      </c:valAx>
-      <c:spPr>
-        <a:noFill/>
-        <a:ln>
-          <a:noFill/>
-        </a:ln>
-        <a:effectLst/>
-      </c:spPr>
-    </c:plotArea>
-    <c:plotVisOnly val="1"/>
-    <c:dispBlanksAs val="span"/>
-    <c:showDLblsOverMax val="1"/>
-  </c:chart>
-  <c:spPr>
-    <a:solidFill>
-      <a:srgbClr val="FFFFFF"/>
-    </a:solidFill>
-    <a:ln>
-      <a:noFill/>
-    </a:ln>
-    <a:effectLst/>
-  </c:spPr>
-  <c:externalData r:id="rId1">
-    <c:autoUpdate val="0"/>
-  </c:externalData>
-</c:chartSpace>
 </file>
 
 <file path=ppt/notesMasters/notesMaster1.xml><?xml version="1.0" encoding="utf-8"?>
@@ -4377,6 +3833,13 @@
             <a:schemeClr val="lt1"/>
           </a:fontRef>
         </p:style>
+        <p:txBody>
+          <a:bodyPr/>
+          <a:lstStyle/>
+          <a:p>
+            <a:endParaRPr lang="en-US"/>
+          </a:p>
+        </p:txBody>
       </p:sp>
       <p:pic>
         <p:nvPicPr>
@@ -5341,84 +4804,6 @@
             <a:pPr marL="0" indent="0">
               <a:buNone/>
             </a:pPr>
-            <a:r>
-              <a:rPr lang="en-US" sz="1600" b="1" dirty="0">
-                <a:solidFill>
-                  <a:srgbClr val="1E293B"/>
-                </a:solidFill>
-                <a:latin typeface="Calibri" pitchFamily="34" charset="0"/>
-                <a:ea typeface="Calibri" pitchFamily="34" charset="-122"/>
-                <a:cs typeface="Calibri" pitchFamily="34" charset="-120"/>
-              </a:rPr>
-              <a:t>Dataset:</a:t>
-            </a:r>
-            <a:r>
-              <a:rPr lang="en-US" sz="1600" dirty="0">
-                <a:solidFill>
-                  <a:srgbClr val="1E293B"/>
-                </a:solidFill>
-                <a:latin typeface="Calibri" pitchFamily="34" charset="0"/>
-                <a:ea typeface="Calibri" pitchFamily="34" charset="-122"/>
-                <a:cs typeface="Calibri" pitchFamily="34" charset="-120"/>
-              </a:rPr>
-              <a:t>  Ames Housing — 2,930 rows, 75 columns</a:t>
-            </a:r>
-            <a:endParaRPr lang="en-US" sz="1600" dirty="0"/>
-          </a:p>
-          <a:p>
-            <a:pPr marL="0" indent="0">
-              <a:buNone/>
-            </a:pPr>
-            <a:r>
-              <a:rPr lang="en-US" sz="1600" b="1" dirty="0">
-                <a:solidFill>
-                  <a:srgbClr val="1E293B"/>
-                </a:solidFill>
-                <a:latin typeface="Calibri" pitchFamily="34" charset="0"/>
-                <a:ea typeface="Calibri" pitchFamily="34" charset="-122"/>
-                <a:cs typeface="Calibri" pitchFamily="34" charset="-120"/>
-              </a:rPr>
-              <a:t>Audience:</a:t>
-            </a:r>
-            <a:r>
-              <a:rPr lang="en-US" sz="1600" dirty="0">
-                <a:solidFill>
-                  <a:srgbClr val="1E293B"/>
-                </a:solidFill>
-                <a:latin typeface="Calibri" pitchFamily="34" charset="0"/>
-                <a:ea typeface="Calibri" pitchFamily="34" charset="-122"/>
-                <a:cs typeface="Calibri" pitchFamily="34" charset="-120"/>
-              </a:rPr>
-              <a:t>  Home buyers, sellers, and real estate agents</a:t>
-            </a:r>
-            <a:endParaRPr lang="en-US" sz="1600" dirty="0"/>
-          </a:p>
-          <a:p>
-            <a:pPr marL="0" indent="0">
-              <a:buNone/>
-            </a:pPr>
-            <a:r>
-              <a:rPr lang="en-US" sz="1600" b="1" dirty="0">
-                <a:solidFill>
-                  <a:srgbClr val="1E293B"/>
-                </a:solidFill>
-                <a:latin typeface="Calibri" pitchFamily="34" charset="0"/>
-                <a:ea typeface="Calibri" pitchFamily="34" charset="-122"/>
-                <a:cs typeface="Calibri" pitchFamily="34" charset="-120"/>
-              </a:rPr>
-              <a:t>Target Variable:</a:t>
-            </a:r>
-            <a:r>
-              <a:rPr lang="en-US" sz="1600" dirty="0">
-                <a:solidFill>
-                  <a:srgbClr val="1E293B"/>
-                </a:solidFill>
-                <a:latin typeface="Calibri" pitchFamily="34" charset="0"/>
-                <a:ea typeface="Calibri" pitchFamily="34" charset="-122"/>
-                <a:cs typeface="Calibri" pitchFamily="34" charset="-120"/>
-              </a:rPr>
-              <a:t>  Sale_Price</a:t>
-            </a:r>
             <a:endParaRPr lang="en-US" sz="1600" dirty="0"/>
           </a:p>
         </p:txBody>
@@ -6092,22 +5477,6 @@
           </a:p>
         </p:txBody>
       </p:sp>
-      <p:graphicFrame>
-        <p:nvGraphicFramePr>
-          <p:cNvPr id="4" name="Chart 0"/>
-          <p:cNvGraphicFramePr/>
-          <p:nvPr/>
-        </p:nvGraphicFramePr>
-        <p:xfrm>
-          <a:off x="365760" y="1005840"/>
-          <a:ext cx="5029200" cy="3657600"/>
-        </p:xfrm>
-        <a:graphic>
-          <a:graphicData uri="http://schemas.openxmlformats.org/drawingml/2006/chart">
-            <c:chart xmlns:c="http://schemas.openxmlformats.org/drawingml/2006/chart" xmlns:r="http://schemas.openxmlformats.org/officeDocument/2006/relationships" r:id="rId3"/>
-          </a:graphicData>
-        </a:graphic>
-      </p:graphicFrame>
       <p:sp>
         <p:nvSpPr>
           <p:cNvPr id="5" name="Text 2"/>
@@ -6220,6 +5589,36 @@
           </a:p>
         </p:txBody>
       </p:sp>
+      <p:pic>
+        <p:nvPicPr>
+          <p:cNvPr id="6" name="Picture 5">
+            <a:extLst>
+              <a:ext uri="{FF2B5EF4-FFF2-40B4-BE49-F238E27FC236}">
+                <a16:creationId xmlns:a16="http://schemas.microsoft.com/office/drawing/2014/main" id="{B8A54A69-7EDF-E10A-2B4B-D1562A1ABD69}"/>
+              </a:ext>
+            </a:extLst>
+          </p:cNvPr>
+          <p:cNvPicPr>
+            <a:picLocks noChangeAspect="1"/>
+          </p:cNvPicPr>
+          <p:nvPr/>
+        </p:nvPicPr>
+        <p:blipFill>
+          <a:blip r:embed="rId3"/>
+          <a:stretch>
+            <a:fillRect/>
+          </a:stretch>
+        </p:blipFill>
+        <p:spPr>
+          <a:xfrm>
+            <a:off x="191012" y="799288"/>
+            <a:ext cx="5392665" cy="3675435"/>
+          </a:xfrm>
+          <a:prstGeom prst="rect">
+            <a:avLst/>
+          </a:prstGeom>
+        </p:spPr>
+      </p:pic>
     </p:spTree>
   </p:cSld>
   <p:clrMapOvr>
@@ -6319,28 +5718,36 @@
           </a:p>
         </p:txBody>
       </p:sp>
-      <p:graphicFrame>
-        <p:nvGraphicFramePr>
-          <p:cNvPr id="4" name="Chart 0"/>
-          <p:cNvGraphicFramePr/>
-          <p:nvPr>
-            <p:extLst>
-              <p:ext uri="{D42A27DB-BD31-4B8C-83A1-F6EECF244321}">
-                <p14:modId xmlns:p14="http://schemas.microsoft.com/office/powerpoint/2010/main" val="365320446"/>
-              </p:ext>
-            </p:extLst>
-          </p:nvPr>
-        </p:nvGraphicFramePr>
-        <p:xfrm>
-          <a:off x="365760" y="1005840"/>
-          <a:ext cx="8229600" cy="3840480"/>
-        </p:xfrm>
-        <a:graphic>
-          <a:graphicData uri="http://schemas.openxmlformats.org/drawingml/2006/chart">
-            <c:chart xmlns:c="http://schemas.openxmlformats.org/drawingml/2006/chart" xmlns:r="http://schemas.openxmlformats.org/officeDocument/2006/relationships" r:id="rId3"/>
-          </a:graphicData>
-        </a:graphic>
-      </p:graphicFrame>
+      <p:pic>
+        <p:nvPicPr>
+          <p:cNvPr id="5" name="Picture 4">
+            <a:extLst>
+              <a:ext uri="{FF2B5EF4-FFF2-40B4-BE49-F238E27FC236}">
+                <a16:creationId xmlns:a16="http://schemas.microsoft.com/office/drawing/2014/main" id="{8403F3E2-B724-CDAD-5C56-85C9908224A9}"/>
+              </a:ext>
+            </a:extLst>
+          </p:cNvPr>
+          <p:cNvPicPr>
+            <a:picLocks noChangeAspect="1"/>
+          </p:cNvPicPr>
+          <p:nvPr/>
+        </p:nvPicPr>
+        <p:blipFill>
+          <a:blip r:embed="rId3"/>
+          <a:stretch>
+            <a:fillRect/>
+          </a:stretch>
+        </p:blipFill>
+        <p:spPr>
+          <a:xfrm>
+            <a:off x="1049128" y="1160456"/>
+            <a:ext cx="6862864" cy="2828262"/>
+          </a:xfrm>
+          <a:prstGeom prst="rect">
+            <a:avLst/>
+          </a:prstGeom>
+        </p:spPr>
+      </p:pic>
     </p:spTree>
   </p:cSld>
   <p:clrMapOvr>
@@ -6674,17 +6081,6 @@
             <a:pPr marL="0" indent="0">
               <a:buNone/>
             </a:pPr>
-            <a:r>
-              <a:rPr lang="en-US" sz="1300" i="1" dirty="0">
-                <a:solidFill>
-                  <a:srgbClr val="64748B"/>
-                </a:solidFill>
-                <a:latin typeface="Calibri" pitchFamily="34" charset="0"/>
-                <a:ea typeface="Calibri" pitchFamily="34" charset="-122"/>
-                <a:cs typeface="Calibri" pitchFamily="34" charset="-120"/>
-              </a:rPr>
-              <a:t>Limitations: Correlation ≠ causation. This dataset covers Ames, Iowa only and may not apply to other markets.</a:t>
-            </a:r>
             <a:endParaRPr lang="en-US" sz="1300" dirty="0"/>
           </a:p>
         </p:txBody>
@@ -6782,7 +6178,7 @@
                 <a:ea typeface="Calibri" pitchFamily="34" charset="-122"/>
                 <a:cs typeface="Calibri" pitchFamily="34" charset="-120"/>
               </a:rPr>
-              <a:t>The data tells a clear story.</a:t>
+              <a:t>Conclusion.</a:t>
             </a:r>
             <a:endParaRPr lang="en-US" sz="3600" dirty="0"/>
           </a:p>
